--- a/classes/parte-2-criptografia-aplicada/052-hmac-y-autenticacion-de-mensajes/clase-052-presentacion.pptx
+++ b/classes/parte-2-criptografia-aplicada/052-hmac-y-autenticacion-de-mensajes/clase-052-presentacion.pptx
@@ -17,6 +17,9 @@
     <p:sldId id="265" r:id="rId16"/>
     <p:sldId id="266" r:id="rId17"/>
     <p:sldId id="267" r:id="rId18"/>
+    <p:sldId id="268" r:id="rId19"/>
+    <p:sldId id="269" r:id="rId20"/>
+    <p:sldId id="270" r:id="rId21"/>
   </p:sldIdLst>
   <p:sldSz cx="9144000" cy="6858000" type="screen4x3"/>
   <p:notesSz cx="6858000" cy="9144000"/>
@@ -3198,7 +3201,7 @@
                   <a:srgbClr val="0B3D2E"/>
                 </a:solidFill>
               </a:rPr>
-              <a:t>⚠️ Errores comunes</a:t>
+              <a:t>✍️ Ejercicios</a:t>
             </a:r>
           </a:p>
         </p:txBody>
@@ -3236,67 +3239,82 @@
                   <a:srgbClr val="22282E"/>
                 </a:solidFill>
               </a:rPr>
-              <a:t>•  MAC-then-Encrypt con CBC — Habilita padding oracle; usa Encrypt-then-MAC o AEAD</a:t>
-            </a:r>
-          </a:p>
-          <a:p>
-            <a:pPr>
-              <a:spcAft>
-                <a:spcPts val="600"/>
-              </a:spcAft>
-            </a:pPr>
-            <a:r>
-              <a:rPr sz="1500">
-                <a:solidFill>
-                  <a:srgbClr val="22282E"/>
-                </a:solidFill>
-              </a:rPr>
-              <a:t>•  Comparar tags con == — Fuga de timing; usa comparedigest</a:t>
-            </a:r>
-          </a:p>
-          <a:p>
-            <a:pPr>
-              <a:spcAft>
-                <a:spcPts val="600"/>
-              </a:spcAft>
-            </a:pPr>
-            <a:r>
-              <a:rPr sz="1500">
-                <a:solidFill>
-                  <a:srgbClr val="22282E"/>
-                </a:solidFill>
-              </a:rPr>
-              <a:t>•  Reutilizar la clave de cifrado como clave de MAC — Debilita ambas; deriva claves separadas</a:t>
-            </a:r>
-          </a:p>
-          <a:p>
-            <a:pPr>
-              <a:spcAft>
-                <a:spcPts val="600"/>
-              </a:spcAft>
-            </a:pPr>
-            <a:r>
-              <a:rPr sz="1500">
-                <a:solidFill>
-                  <a:srgbClr val="22282E"/>
-                </a:solidFill>
-              </a:rPr>
-              <a:t>•  Verificar el MAC después de descifrar — Ya procesaste datos no autenticados; verifica antes</a:t>
-            </a:r>
-          </a:p>
-          <a:p>
-            <a:pPr>
-              <a:spcAft>
-                <a:spcPts val="600"/>
-              </a:spcAft>
-            </a:pPr>
-            <a:r>
-              <a:rPr sz="1500">
-                <a:solidFill>
-                  <a:srgbClr val="22282E"/>
-                </a:solidFill>
-              </a:rPr>
-              <a:t>•  Hash simple como "firma" de API — No autentica origen; usa HMAC con clave secreta</a:t>
+              <a:t>•  Explica por qué hash(clave || mensaje) es inseguro y HMAC no.</a:t>
+            </a:r>
+          </a:p>
+          <a:p>
+            <a:pPr>
+              <a:spcAft>
+                <a:spcPts val="600"/>
+              </a:spcAft>
+            </a:pPr>
+            <a:r>
+              <a:rPr sz="1500">
+                <a:solidFill>
+                  <a:srgbClr val="22282E"/>
+                </a:solidFill>
+              </a:rPr>
+              <a:t>•  Implementa Encrypt-then-MAC y verifica el MAC antes de descifrar.</a:t>
+            </a:r>
+          </a:p>
+          <a:p>
+            <a:pPr>
+              <a:spcAft>
+                <a:spcPts val="600"/>
+              </a:spcAft>
+            </a:pPr>
+            <a:r>
+              <a:rPr sz="1500">
+                <a:solidFill>
+                  <a:srgbClr val="22282E"/>
+                </a:solidFill>
+              </a:rPr>
+              <a:t>•  ¿Por qué se usan claves distintas para cifrar y para el MAC?</a:t>
+            </a:r>
+          </a:p>
+          <a:p>
+            <a:pPr>
+              <a:spcAft>
+                <a:spcPts val="600"/>
+              </a:spcAft>
+            </a:pPr>
+            <a:r>
+              <a:rPr sz="1500">
+                <a:solidFill>
+                  <a:srgbClr val="22282E"/>
+                </a:solidFill>
+              </a:rPr>
+              <a:t>•  Investiga cómo firma un JWT HS256 y verifica uno con tu HMAC.</a:t>
+            </a:r>
+          </a:p>
+          <a:p>
+            <a:pPr>
+              <a:spcAft>
+                <a:spcPts val="600"/>
+              </a:spcAft>
+            </a:pPr>
+            <a:r>
+              <a:rPr sz="1500">
+                <a:solidFill>
+                  <a:srgbClr val="22282E"/>
+                </a:solidFill>
+              </a:rPr>
+              <a:t>•  Demuestra que cambiar un bit del mensaje invalida el tag.</a:t>
+            </a:r>
+          </a:p>
+          <a:p>
+            <a:pPr>
+              <a:spcAft>
+                <a:spcPts val="600"/>
+              </a:spcAft>
+            </a:pPr>
+            <a:r>
+              <a:rPr sz="1500">
+                <a:solidFill>
+                  <a:srgbClr val="22282E"/>
+                </a:solidFill>
+              </a:rPr>
+              <a:t>•  Compara HMAC con los MAC integrados en AEAD (GCM/Poly1305).</a:t>
             </a:r>
           </a:p>
         </p:txBody>
@@ -3347,7 +3365,7 @@
                   <a:srgbClr val="0B3D2E"/>
                 </a:solidFill>
               </a:rPr>
-              <a:t>❓ Preguntas frecuentes</a:t>
+              <a:t>📝 Reto verificable</a:t>
             </a:r>
           </a:p>
         </p:txBody>
@@ -3385,82 +3403,7 @@
                   <a:srgbClr val="22282E"/>
                 </a:solidFill>
               </a:rPr>
-              <a:t>•  ❓ ¿HMAC o AEAD?</a:t>
-            </a:r>
-          </a:p>
-          <a:p>
-            <a:pPr>
-              <a:spcAft>
-                <a:spcPts val="600"/>
-              </a:spcAft>
-            </a:pPr>
-            <a:r>
-              <a:rPr sz="1500">
-                <a:solidFill>
-                  <a:srgbClr val="22282E"/>
-                </a:solidFill>
-              </a:rPr>
-              <a:t>•  Si ya cifras, prefiere AEAD (GCM, ChaCha20-Poly1305), que integra el MAC. HMAC brilla para autenticar datos que no ciframos (tokens, webhooks).</a:t>
-            </a:r>
-          </a:p>
-          <a:p>
-            <a:pPr>
-              <a:spcAft>
-                <a:spcPts val="600"/>
-              </a:spcAft>
-            </a:pPr>
-            <a:r>
-              <a:rPr sz="1500">
-                <a:solidFill>
-                  <a:srgbClr val="22282E"/>
-                </a:solidFill>
-              </a:rPr>
-              <a:t>•  ❓ ¿Puedo usar HMAC-MD5?</a:t>
-            </a:r>
-          </a:p>
-          <a:p>
-            <a:pPr>
-              <a:spcAft>
-                <a:spcPts val="600"/>
-              </a:spcAft>
-            </a:pPr>
-            <a:r>
-              <a:rPr sz="1500">
-                <a:solidFill>
-                  <a:srgbClr val="22282E"/>
-                </a:solidFill>
-              </a:rPr>
-              <a:t>•  HMAC-MD5 resiste mejor que MD5 solo, pero usa HMAC-SHA256 por buenas prácticas.</a:t>
-            </a:r>
-          </a:p>
-          <a:p>
-            <a:pPr>
-              <a:spcAft>
-                <a:spcPts val="600"/>
-              </a:spcAft>
-            </a:pPr>
-            <a:r>
-              <a:rPr sz="1500">
-                <a:solidFill>
-                  <a:srgbClr val="22282E"/>
-                </a:solidFill>
-              </a:rPr>
-              <a:t>•  ❓ ¿El MAC da confidencialidad?</a:t>
-            </a:r>
-          </a:p>
-          <a:p>
-            <a:pPr>
-              <a:spcAft>
-                <a:spcPts val="600"/>
-              </a:spcAft>
-            </a:pPr>
-            <a:r>
-              <a:rPr sz="1500">
-                <a:solidFill>
-                  <a:srgbClr val="22282E"/>
-                </a:solidFill>
-              </a:rPr>
-              <a:t>•  No; solo autenticidad e integridad. Combínalo con cifrado para confidencialidad.</a:t>
+              <a:t>•  Implementa un canal autenticado sencillo: el emisor envía (IV, ciphertext, HMAC) y el receptor rechaza cualquier mensaje manipulado sin descifrarlo. Criterio de aceptación: alterar cualquier byte del…</a:t>
             </a:r>
           </a:p>
         </p:txBody>
@@ -3511,7 +3454,7 @@
                   <a:srgbClr val="0B3D2E"/>
                 </a:solidFill>
               </a:rPr>
-              <a:t>🔗 Referencias</a:t>
+              <a:t>⚠️ Errores comunes</a:t>
             </a:r>
           </a:p>
         </p:txBody>
@@ -3549,6 +3492,319 @@
                   <a:srgbClr val="22282E"/>
                 </a:solidFill>
               </a:rPr>
+              <a:t>•  MAC-then-Encrypt con CBC — Habilita padding oracle; usa Encrypt-then-MAC o AEAD</a:t>
+            </a:r>
+          </a:p>
+          <a:p>
+            <a:pPr>
+              <a:spcAft>
+                <a:spcPts val="600"/>
+              </a:spcAft>
+            </a:pPr>
+            <a:r>
+              <a:rPr sz="1500">
+                <a:solidFill>
+                  <a:srgbClr val="22282E"/>
+                </a:solidFill>
+              </a:rPr>
+              <a:t>•  Comparar tags con == — Fuga de timing; usa comparedigest</a:t>
+            </a:r>
+          </a:p>
+          <a:p>
+            <a:pPr>
+              <a:spcAft>
+                <a:spcPts val="600"/>
+              </a:spcAft>
+            </a:pPr>
+            <a:r>
+              <a:rPr sz="1500">
+                <a:solidFill>
+                  <a:srgbClr val="22282E"/>
+                </a:solidFill>
+              </a:rPr>
+              <a:t>•  Reutilizar la clave de cifrado como clave de MAC — Debilita ambas; deriva claves separadas</a:t>
+            </a:r>
+          </a:p>
+          <a:p>
+            <a:pPr>
+              <a:spcAft>
+                <a:spcPts val="600"/>
+              </a:spcAft>
+            </a:pPr>
+            <a:r>
+              <a:rPr sz="1500">
+                <a:solidFill>
+                  <a:srgbClr val="22282E"/>
+                </a:solidFill>
+              </a:rPr>
+              <a:t>•  Verificar el MAC después de descifrar — Ya procesaste datos no autenticados; verifica antes</a:t>
+            </a:r>
+          </a:p>
+          <a:p>
+            <a:pPr>
+              <a:spcAft>
+                <a:spcPts val="600"/>
+              </a:spcAft>
+            </a:pPr>
+            <a:r>
+              <a:rPr sz="1500">
+                <a:solidFill>
+                  <a:srgbClr val="22282E"/>
+                </a:solidFill>
+              </a:rPr>
+              <a:t>•  Hash simple como "firma" de API — No autentica origen; usa HMAC con clave secreta</a:t>
+            </a:r>
+          </a:p>
+        </p:txBody>
+      </p:sp>
+    </p:spTree>
+  </p:cSld>
+  <p:clrMapOvr>
+    <a:masterClrMapping/>
+  </p:clrMapOvr>
+</p:sld>
+</file>
+
+<file path=ppt/slides/slide13.xml><?xml version="1.0" encoding="utf-8"?>
+<p:sld xmlns:a="http://schemas.openxmlformats.org/drawingml/2006/main" xmlns:p="http://schemas.openxmlformats.org/presentationml/2006/main" xmlns:r="http://schemas.openxmlformats.org/officeDocument/2006/relationships">
+  <p:cSld>
+    <p:spTree>
+      <p:nvGrpSpPr>
+        <p:cNvPr id="1" name=""/>
+        <p:cNvGrpSpPr/>
+        <p:nvPr/>
+      </p:nvGrpSpPr>
+      <p:grpSpPr/>
+      <p:sp>
+        <p:nvSpPr>
+          <p:cNvPr id="2" name="TextBox 1"/>
+          <p:cNvSpPr txBox="1"/>
+          <p:nvPr/>
+        </p:nvSpPr>
+        <p:spPr>
+          <a:xfrm>
+            <a:off x="457200" y="320040"/>
+            <a:ext cx="8229600" cy="822960"/>
+          </a:xfrm>
+          <a:prstGeom prst="rect">
+            <a:avLst/>
+          </a:prstGeom>
+          <a:noFill/>
+        </p:spPr>
+        <p:txBody>
+          <a:bodyPr wrap="square">
+            <a:spAutoFit/>
+          </a:bodyPr>
+          <a:lstStyle/>
+          <a:p>
+            <a:r>
+              <a:rPr sz="2600" b="1">
+                <a:solidFill>
+                  <a:srgbClr val="0B3D2E"/>
+                </a:solidFill>
+              </a:rPr>
+              <a:t>❓ Preguntas frecuentes</a:t>
+            </a:r>
+          </a:p>
+        </p:txBody>
+      </p:sp>
+      <p:sp>
+        <p:nvSpPr>
+          <p:cNvPr id="3" name="TextBox 2"/>
+          <p:cNvSpPr txBox="1"/>
+          <p:nvPr/>
+        </p:nvSpPr>
+        <p:spPr>
+          <a:xfrm>
+            <a:off x="457200" y="1280160"/>
+            <a:ext cx="8229600" cy="4937760"/>
+          </a:xfrm>
+          <a:prstGeom prst="rect">
+            <a:avLst/>
+          </a:prstGeom>
+          <a:noFill/>
+        </p:spPr>
+        <p:txBody>
+          <a:bodyPr wrap="square">
+            <a:spAutoFit/>
+          </a:bodyPr>
+          <a:lstStyle/>
+          <a:p>
+            <a:pPr>
+              <a:spcAft>
+                <a:spcPts val="600"/>
+              </a:spcAft>
+            </a:pPr>
+            <a:r>
+              <a:rPr sz="1500">
+                <a:solidFill>
+                  <a:srgbClr val="22282E"/>
+                </a:solidFill>
+              </a:rPr>
+              <a:t>•  ❓ ¿HMAC o AEAD?</a:t>
+            </a:r>
+          </a:p>
+          <a:p>
+            <a:pPr>
+              <a:spcAft>
+                <a:spcPts val="600"/>
+              </a:spcAft>
+            </a:pPr>
+            <a:r>
+              <a:rPr sz="1500">
+                <a:solidFill>
+                  <a:srgbClr val="22282E"/>
+                </a:solidFill>
+              </a:rPr>
+              <a:t>•  Si ya cifras, prefiere AEAD (GCM, ChaCha20-Poly1305), que integra el MAC. HMAC brilla para autenticar datos que no ciframos (tokens, webhooks).</a:t>
+            </a:r>
+          </a:p>
+          <a:p>
+            <a:pPr>
+              <a:spcAft>
+                <a:spcPts val="600"/>
+              </a:spcAft>
+            </a:pPr>
+            <a:r>
+              <a:rPr sz="1500">
+                <a:solidFill>
+                  <a:srgbClr val="22282E"/>
+                </a:solidFill>
+              </a:rPr>
+              <a:t>•  ❓ ¿Puedo usar HMAC-MD5?</a:t>
+            </a:r>
+          </a:p>
+          <a:p>
+            <a:pPr>
+              <a:spcAft>
+                <a:spcPts val="600"/>
+              </a:spcAft>
+            </a:pPr>
+            <a:r>
+              <a:rPr sz="1500">
+                <a:solidFill>
+                  <a:srgbClr val="22282E"/>
+                </a:solidFill>
+              </a:rPr>
+              <a:t>•  HMAC-MD5 resiste mejor que MD5 solo, pero usa HMAC-SHA256 por buenas prácticas.</a:t>
+            </a:r>
+          </a:p>
+          <a:p>
+            <a:pPr>
+              <a:spcAft>
+                <a:spcPts val="600"/>
+              </a:spcAft>
+            </a:pPr>
+            <a:r>
+              <a:rPr sz="1500">
+                <a:solidFill>
+                  <a:srgbClr val="22282E"/>
+                </a:solidFill>
+              </a:rPr>
+              <a:t>•  ❓ ¿El MAC da confidencialidad?</a:t>
+            </a:r>
+          </a:p>
+          <a:p>
+            <a:pPr>
+              <a:spcAft>
+                <a:spcPts val="600"/>
+              </a:spcAft>
+            </a:pPr>
+            <a:r>
+              <a:rPr sz="1500">
+                <a:solidFill>
+                  <a:srgbClr val="22282E"/>
+                </a:solidFill>
+              </a:rPr>
+              <a:t>•  No; solo autenticidad e integridad. Combínalo con cifrado para confidencialidad.</a:t>
+            </a:r>
+          </a:p>
+        </p:txBody>
+      </p:sp>
+    </p:spTree>
+  </p:cSld>
+  <p:clrMapOvr>
+    <a:masterClrMapping/>
+  </p:clrMapOvr>
+</p:sld>
+</file>
+
+<file path=ppt/slides/slide14.xml><?xml version="1.0" encoding="utf-8"?>
+<p:sld xmlns:a="http://schemas.openxmlformats.org/drawingml/2006/main" xmlns:p="http://schemas.openxmlformats.org/presentationml/2006/main" xmlns:r="http://schemas.openxmlformats.org/officeDocument/2006/relationships">
+  <p:cSld>
+    <p:spTree>
+      <p:nvGrpSpPr>
+        <p:cNvPr id="1" name=""/>
+        <p:cNvGrpSpPr/>
+        <p:nvPr/>
+      </p:nvGrpSpPr>
+      <p:grpSpPr/>
+      <p:sp>
+        <p:nvSpPr>
+          <p:cNvPr id="2" name="TextBox 1"/>
+          <p:cNvSpPr txBox="1"/>
+          <p:nvPr/>
+        </p:nvSpPr>
+        <p:spPr>
+          <a:xfrm>
+            <a:off x="457200" y="320040"/>
+            <a:ext cx="8229600" cy="822960"/>
+          </a:xfrm>
+          <a:prstGeom prst="rect">
+            <a:avLst/>
+          </a:prstGeom>
+          <a:noFill/>
+        </p:spPr>
+        <p:txBody>
+          <a:bodyPr wrap="square">
+            <a:spAutoFit/>
+          </a:bodyPr>
+          <a:lstStyle/>
+          <a:p>
+            <a:r>
+              <a:rPr sz="2600" b="1">
+                <a:solidFill>
+                  <a:srgbClr val="0B3D2E"/>
+                </a:solidFill>
+              </a:rPr>
+              <a:t>🔗 Referencias</a:t>
+            </a:r>
+          </a:p>
+        </p:txBody>
+      </p:sp>
+      <p:sp>
+        <p:nvSpPr>
+          <p:cNvPr id="3" name="TextBox 2"/>
+          <p:cNvSpPr txBox="1"/>
+          <p:nvPr/>
+        </p:nvSpPr>
+        <p:spPr>
+          <a:xfrm>
+            <a:off x="457200" y="1280160"/>
+            <a:ext cx="8229600" cy="4937760"/>
+          </a:xfrm>
+          <a:prstGeom prst="rect">
+            <a:avLst/>
+          </a:prstGeom>
+          <a:noFill/>
+        </p:spPr>
+        <p:txBody>
+          <a:bodyPr wrap="square">
+            <a:spAutoFit/>
+          </a:bodyPr>
+          <a:lstStyle/>
+          <a:p>
+            <a:pPr>
+              <a:spcAft>
+                <a:spcPts val="600"/>
+              </a:spcAft>
+            </a:pPr>
+            <a:r>
+              <a:rPr sz="1500">
+                <a:solidFill>
+                  <a:srgbClr val="22282E"/>
+                </a:solidFill>
+              </a:rPr>
               <a:t>•  IETF RFC 2104 (HMAC) — &lt;https://www.rfc-editor.org/rfc/rfc2104&gt;</a:t>
             </a:r>
           </a:p>
@@ -3599,6 +3855,81 @@
           </a:p>
         </p:txBody>
       </p:sp>
+    </p:spTree>
+  </p:cSld>
+  <p:clrMapOvr>
+    <a:masterClrMapping/>
+  </p:clrMapOvr>
+</p:sld>
+</file>
+
+<file path=ppt/slides/slide15.xml><?xml version="1.0" encoding="utf-8"?>
+<p:sld xmlns:a="http://schemas.openxmlformats.org/drawingml/2006/main" xmlns:p="http://schemas.openxmlformats.org/presentationml/2006/main" xmlns:r="http://schemas.openxmlformats.org/officeDocument/2006/relationships">
+  <p:cSld>
+    <p:spTree>
+      <p:nvGrpSpPr>
+        <p:cNvPr id="1" name=""/>
+        <p:cNvGrpSpPr/>
+        <p:nvPr/>
+      </p:nvGrpSpPr>
+      <p:grpSpPr/>
+      <p:sp>
+        <p:nvSpPr>
+          <p:cNvPr id="2" name="TextBox 1"/>
+          <p:cNvSpPr txBox="1"/>
+          <p:nvPr/>
+        </p:nvSpPr>
+        <p:spPr>
+          <a:xfrm>
+            <a:off x="457200" y="274320"/>
+            <a:ext cx="8229600" cy="640080"/>
+          </a:xfrm>
+          <a:prstGeom prst="rect">
+            <a:avLst/>
+          </a:prstGeom>
+          <a:noFill/>
+        </p:spPr>
+        <p:txBody>
+          <a:bodyPr wrap="square">
+            <a:spAutoFit/>
+          </a:bodyPr>
+          <a:lstStyle/>
+          <a:p>
+            <a:r>
+              <a:rPr sz="2200" b="1">
+                <a:solidFill>
+                  <a:srgbClr val="0B3D2E"/>
+                </a:solidFill>
+              </a:rPr>
+              <a:t>Diagrama de la clase</a:t>
+            </a:r>
+          </a:p>
+        </p:txBody>
+      </p:sp>
+      <p:pic>
+        <p:nvPicPr>
+          <p:cNvPr id="3" name="Picture 2" descr="0762286e606202b3.png"/>
+          <p:cNvPicPr>
+            <a:picLocks noChangeAspect="1"/>
+          </p:cNvPicPr>
+          <p:nvPr/>
+        </p:nvPicPr>
+        <p:blipFill>
+          <a:blip r:embed="rId2"/>
+          <a:stretch>
+            <a:fillRect/>
+          </a:stretch>
+        </p:blipFill>
+        <p:spPr>
+          <a:xfrm>
+            <a:off x="3182419" y="1097280"/>
+            <a:ext cx="2779162" cy="5303520"/>
+          </a:xfrm>
+          <a:prstGeom prst="rect">
+            <a:avLst/>
+          </a:prstGeom>
+        </p:spPr>
+      </p:pic>
     </p:spTree>
   </p:cSld>
   <p:clrMapOvr>
@@ -3683,7 +4014,7 @@
                   <a:srgbClr val="22282E"/>
                 </a:solidFill>
               </a:rPr>
-              <a:t>•  Entender qué es un código de autenticación de mensajes (MAC), por qué la integridad sin autenticación no basta, y cómo HMAC combina una función hash con una clave secreta para garantizar que un mensaje proviene de quien dice y no fue alterado. El alumno aprenderá también el orden correcto de combinar cifrado y MAC (Encrypt-then-MAC) y por qué la comparación debe ser en tiempo constante.</a:t>
+              <a:t>•  Entender qué es un código de autenticación de mensajes (MAC), por qué la integridad sin autenticación no basta, y cómo HMAC combina una función hash con una clave secreta para garantizar que un…</a:t>
             </a:r>
           </a:p>
         </p:txBody>
@@ -4077,7 +4408,7 @@
                   <a:srgbClr val="0B3D2E"/>
                 </a:solidFill>
               </a:rPr>
-              <a:t>📖 Definiciones y características</a:t>
+              <a:t>🧠 Explicación en profundidad</a:t>
             </a:r>
           </a:p>
         </p:txBody>
@@ -4115,82 +4446,97 @@
                   <a:srgbClr val="22282E"/>
                 </a:solidFill>
               </a:rPr>
-              <a:t>•  MAC: etiqueta que autentica un mensaje usando una clave secreta compartida. Característica: sin la clave no se puede falsificar.</a:t>
-            </a:r>
-          </a:p>
-          <a:p>
-            <a:pPr>
-              <a:spcAft>
-                <a:spcPts val="600"/>
-              </a:spcAft>
-            </a:pPr>
-            <a:r>
-              <a:rPr sz="1500">
-                <a:solidFill>
-                  <a:srgbClr val="22282E"/>
-                </a:solidFill>
-              </a:rPr>
-              <a:t>•  HMAC: HMAC(k,m) = H((k⊕opad) || H((k⊕ipad) || m)). Seguro con cualquier hash decente, inmune a extensión de longitud.</a:t>
-            </a:r>
-          </a:p>
-          <a:p>
-            <a:pPr>
-              <a:spcAft>
-                <a:spcPts val="600"/>
-              </a:spcAft>
-            </a:pPr>
-            <a:r>
-              <a:rPr sz="1500">
-                <a:solidFill>
-                  <a:srgbClr val="22282E"/>
-                </a:solidFill>
-              </a:rPr>
-              <a:t>•  Integridad vs autenticación: un hash detecta cambios accidentales; un MAC detecta cambios maliciosos porque el atacante no tiene la clave.</a:t>
-            </a:r>
-          </a:p>
-          <a:p>
-            <a:pPr>
-              <a:spcAft>
-                <a:spcPts val="600"/>
-              </a:spcAft>
-            </a:pPr>
-            <a:r>
-              <a:rPr sz="1500">
-                <a:solidFill>
-                  <a:srgbClr val="22282E"/>
-                </a:solidFill>
-              </a:rPr>
-              <a:t>•  Encrypt-then-MAC: cifrar y luego calcular el MAC sobre el texto cifrado. Patrón recomendado; permite rechazar sin descifrar.</a:t>
-            </a:r>
-          </a:p>
-          <a:p>
-            <a:pPr>
-              <a:spcAft>
-                <a:spcPts val="600"/>
-              </a:spcAft>
-            </a:pPr>
-            <a:r>
-              <a:rPr sz="1500">
-                <a:solidFill>
-                  <a:srgbClr val="22282E"/>
-                </a:solidFill>
-              </a:rPr>
-              <a:t>•  Comparación en tiempo constante: comparar etiquetas sin salir antes en el primer byte distinto, evitando fugas temporales.</a:t>
-            </a:r>
-          </a:p>
-          <a:p>
-            <a:pPr>
-              <a:spcAft>
-                <a:spcPts val="600"/>
-              </a:spcAft>
-            </a:pPr>
-            <a:r>
-              <a:rPr sz="1500">
-                <a:solidFill>
-                  <a:srgbClr val="22282E"/>
-                </a:solidFill>
-              </a:rPr>
-              <a:t>•  Clave simétrica de MAC: debe ser distinta de la clave de cifrado y protegerse igual de bien.</a:t>
+              <a:t>•  Un digest garantiza que un dato no cambió si el digest llegó por un canal fiable. Pero</a:t>
+            </a:r>
+          </a:p>
+          <a:p>
+            <a:pPr>
+              <a:spcAft>
+                <a:spcPts val="600"/>
+              </a:spcAft>
+            </a:pPr>
+            <a:r>
+              <a:rPr sz="1500">
+                <a:solidFill>
+                  <a:srgbClr val="22282E"/>
+                </a:solidFill>
+              </a:rPr>
+              <a:t>•  si viaja junto al mensaje, un atacante que altere el mensaje recalcula el digest y nadie</a:t>
+            </a:r>
+          </a:p>
+          <a:p>
+            <a:pPr>
+              <a:spcAft>
+                <a:spcPts val="600"/>
+              </a:spcAft>
+            </a:pPr>
+            <a:r>
+              <a:rPr sz="1500">
+                <a:solidFill>
+                  <a:srgbClr val="22282E"/>
+                </a:solidFill>
+              </a:rPr>
+              <a:t>•  lo nota: un hash sin clave no aporta autenticidad ninguna. Un MAC (Message</a:t>
+            </a:r>
+          </a:p>
+          <a:p>
+            <a:pPr>
+              <a:spcAft>
+                <a:spcPts val="600"/>
+              </a:spcAft>
+            </a:pPr>
+            <a:r>
+              <a:rPr sz="1500">
+                <a:solidFill>
+                  <a:srgbClr val="22282E"/>
+                </a:solidFill>
+              </a:rPr>
+              <a:t>•  Authentication Code) resuelve eso incorporando una clave secreta compartida: solo quien</a:t>
+            </a:r>
+          </a:p>
+          <a:p>
+            <a:pPr>
+              <a:spcAft>
+                <a:spcPts val="600"/>
+              </a:spcAft>
+            </a:pPr>
+            <a:r>
+              <a:rPr sz="1500">
+                <a:solidFill>
+                  <a:srgbClr val="22282E"/>
+                </a:solidFill>
+              </a:rPr>
+              <a:t>•  la conoce puede generar una etiqueta válida, así que verificarla prueba a la vez que el</a:t>
+            </a:r>
+          </a:p>
+          <a:p>
+            <a:pPr>
+              <a:spcAft>
+                <a:spcPts val="600"/>
+              </a:spcAft>
+            </a:pPr>
+            <a:r>
+              <a:rPr sz="1500">
+                <a:solidFill>
+                  <a:srgbClr val="22282E"/>
+                </a:solidFill>
+              </a:rPr>
+              <a:t>•  mensaje no se alteró y que proviene de alguien que posee la clave.</a:t>
+            </a:r>
+          </a:p>
+          <a:p>
+            <a:pPr>
+              <a:spcAft>
+                <a:spcPts val="600"/>
+              </a:spcAft>
+            </a:pPr>
+            <a:r>
+              <a:rPr sz="1500">
+                <a:solidFill>
+                  <a:srgbClr val="22282E"/>
+                </a:solidFill>
+              </a:rPr>
+              <a:t>•  La diferencia con una firma digital (clase 054) es el tipo de clave y su consecuencia</a:t>
             </a:r>
           </a:p>
         </p:txBody>
@@ -4241,7 +4587,7 @@
                   <a:srgbClr val="0B3D2E"/>
                 </a:solidFill>
               </a:rPr>
-              <a:t>🧰 Herramientas y preparación</a:t>
+              <a:t>📖 Definiciones y características</a:t>
             </a:r>
           </a:p>
         </p:txBody>
@@ -4279,37 +4625,82 @@
                   <a:srgbClr val="22282E"/>
                 </a:solidFill>
               </a:rPr>
-              <a:t>•  openssl version</a:t>
-            </a:r>
-          </a:p>
-          <a:p>
-            <a:pPr>
-              <a:spcAft>
-                <a:spcPts val="600"/>
-              </a:spcAft>
-            </a:pPr>
-            <a:r>
-              <a:rPr sz="1500">
-                <a:solidFill>
-                  <a:srgbClr val="22282E"/>
-                </a:solidFill>
-              </a:rPr>
-              <a:t>•  pip install cryptography</a:t>
-            </a:r>
-          </a:p>
-          <a:p>
-            <a:pPr>
-              <a:spcAft>
-                <a:spcPts val="600"/>
-              </a:spcAft>
-            </a:pPr>
-            <a:r>
-              <a:rPr sz="1500">
-                <a:solidFill>
-                  <a:srgbClr val="22282E"/>
-                </a:solidFill>
-              </a:rPr>
-              <a:t>•  Laboratorio local. Las claves de HMAC son de práctica.</a:t>
+              <a:t>•  MAC: etiqueta que autentica un mensaje usando una clave secreta compartida. Característica: sin la clave no se puede falsificar.</a:t>
+            </a:r>
+          </a:p>
+          <a:p>
+            <a:pPr>
+              <a:spcAft>
+                <a:spcPts val="600"/>
+              </a:spcAft>
+            </a:pPr>
+            <a:r>
+              <a:rPr sz="1500">
+                <a:solidFill>
+                  <a:srgbClr val="22282E"/>
+                </a:solidFill>
+              </a:rPr>
+              <a:t>•  HMAC: HMAC(k,m) = H((k⊕opad) || H((k⊕ipad) || m)). Seguro con cualquier hash decente, inmune a extensión de longitud.</a:t>
+            </a:r>
+          </a:p>
+          <a:p>
+            <a:pPr>
+              <a:spcAft>
+                <a:spcPts val="600"/>
+              </a:spcAft>
+            </a:pPr>
+            <a:r>
+              <a:rPr sz="1500">
+                <a:solidFill>
+                  <a:srgbClr val="22282E"/>
+                </a:solidFill>
+              </a:rPr>
+              <a:t>•  Integridad vs autenticación: un hash detecta cambios accidentales; un MAC detecta cambios maliciosos porque el atacante no tiene la clave.</a:t>
+            </a:r>
+          </a:p>
+          <a:p>
+            <a:pPr>
+              <a:spcAft>
+                <a:spcPts val="600"/>
+              </a:spcAft>
+            </a:pPr>
+            <a:r>
+              <a:rPr sz="1500">
+                <a:solidFill>
+                  <a:srgbClr val="22282E"/>
+                </a:solidFill>
+              </a:rPr>
+              <a:t>•  Encrypt-then-MAC: cifrar y luego calcular el MAC sobre el texto cifrado. Patrón recomendado; permite rechazar sin descifrar.</a:t>
+            </a:r>
+          </a:p>
+          <a:p>
+            <a:pPr>
+              <a:spcAft>
+                <a:spcPts val="600"/>
+              </a:spcAft>
+            </a:pPr>
+            <a:r>
+              <a:rPr sz="1500">
+                <a:solidFill>
+                  <a:srgbClr val="22282E"/>
+                </a:solidFill>
+              </a:rPr>
+              <a:t>•  Comparación en tiempo constante: comparar etiquetas sin salir antes en el primer byte distinto, evitando fugas temporales.</a:t>
+            </a:r>
+          </a:p>
+          <a:p>
+            <a:pPr>
+              <a:spcAft>
+                <a:spcPts val="600"/>
+              </a:spcAft>
+            </a:pPr>
+            <a:r>
+              <a:rPr sz="1500">
+                <a:solidFill>
+                  <a:srgbClr val="22282E"/>
+                </a:solidFill>
+              </a:rPr>
+              <a:t>•  Clave simétrica de MAC: debe ser distinta de la clave de cifrado y protegerse igual de bien.</a:t>
             </a:r>
           </a:p>
         </p:txBody>
@@ -4360,7 +4751,7 @@
                   <a:srgbClr val="0B3D2E"/>
                 </a:solidFill>
               </a:rPr>
-              <a:t>🧪 Laboratorio guiado</a:t>
+              <a:t>📔 Glosario</a:t>
             </a:r>
           </a:p>
         </p:txBody>
@@ -4398,97 +4789,97 @@
                   <a:srgbClr val="22282E"/>
                 </a:solidFill>
               </a:rPr>
-              <a:t>•  HMAC con OpenSSL:</a:t>
-            </a:r>
-          </a:p>
-          <a:p>
-            <a:pPr>
-              <a:spcAft>
-                <a:spcPts val="600"/>
-              </a:spcAft>
-            </a:pPr>
-            <a:r>
-              <a:rPr sz="1500">
-                <a:solidFill>
-                  <a:srgbClr val="22282E"/>
-                </a:solidFill>
-              </a:rPr>
-              <a:t>•  echo -n "mensaje" | openssl dgst -sha256 -hmac "clave-secreta"</a:t>
-            </a:r>
-          </a:p>
-          <a:p>
-            <a:pPr>
-              <a:spcAft>
-                <a:spcPts val="600"/>
-              </a:spcAft>
-            </a:pPr>
-            <a:r>
-              <a:rPr sz="1500">
-                <a:solidFill>
-                  <a:srgbClr val="22282E"/>
-                </a:solidFill>
-              </a:rPr>
-              <a:t>•  HMAC en Python y verificación segura:</a:t>
-            </a:r>
-          </a:p>
-          <a:p>
-            <a:pPr>
-              <a:spcAft>
-                <a:spcPts val="600"/>
-              </a:spcAft>
-            </a:pPr>
-            <a:r>
-              <a:rPr sz="1500">
-                <a:solidFill>
-                  <a:srgbClr val="22282E"/>
-                </a:solidFill>
-              </a:rPr>
-              <a:t>•  import hmac, hashlib</a:t>
-            </a:r>
-          </a:p>
-          <a:p>
-            <a:pPr>
-              <a:spcAft>
-                <a:spcPts val="600"/>
-              </a:spcAft>
-            </a:pPr>
-            <a:r>
-              <a:rPr sz="1500">
-                <a:solidFill>
-                  <a:srgbClr val="22282E"/>
-                </a:solidFill>
-              </a:rPr>
-              <a:t>•  key = b"clave-secreta"</a:t>
-            </a:r>
-          </a:p>
-          <a:p>
-            <a:pPr>
-              <a:spcAft>
-                <a:spcPts val="600"/>
-              </a:spcAft>
-            </a:pPr>
-            <a:r>
-              <a:rPr sz="1500">
-                <a:solidFill>
-                  <a:srgbClr val="22282E"/>
-                </a:solidFill>
-              </a:rPr>
-              <a:t>•  tag = hmac.new(key, b"mensaje", hashlib.sha256).hexdigest()</a:t>
-            </a:r>
-          </a:p>
-          <a:p>
-            <a:pPr>
-              <a:spcAft>
-                <a:spcPts val="600"/>
-              </a:spcAft>
-            </a:pPr>
-            <a:r>
-              <a:rPr sz="1500">
-                <a:solidFill>
-                  <a:srgbClr val="22282E"/>
-                </a:solidFill>
-              </a:rPr>
-              <a:t>•  ok = hmac.comparedigest(tag, tag)</a:t>
+              <a:t>•  Término — Definición concisa</a:t>
+            </a:r>
+          </a:p>
+          <a:p>
+            <a:pPr>
+              <a:spcAft>
+                <a:spcPts val="600"/>
+              </a:spcAft>
+            </a:pPr>
+            <a:r>
+              <a:rPr sz="1500">
+                <a:solidFill>
+                  <a:srgbClr val="22282E"/>
+                </a:solidFill>
+              </a:rPr>
+              <a:t>•  MAC — Etiqueta con clave secreta que prueba integridad y origen</a:t>
+            </a:r>
+          </a:p>
+          <a:p>
+            <a:pPr>
+              <a:spcAft>
+                <a:spcPts val="600"/>
+              </a:spcAft>
+            </a:pPr>
+            <a:r>
+              <a:rPr sz="1500">
+                <a:solidFill>
+                  <a:srgbClr val="22282E"/>
+                </a:solidFill>
+              </a:rPr>
+              <a:t>•  Autenticidad — Garantía de que el mensaje viene de quien dice</a:t>
+            </a:r>
+          </a:p>
+          <a:p>
+            <a:pPr>
+              <a:spcAft>
+                <a:spcPts val="600"/>
+              </a:spcAft>
+            </a:pPr>
+            <a:r>
+              <a:rPr sz="1500">
+                <a:solidFill>
+                  <a:srgbClr val="22282E"/>
+                </a:solidFill>
+              </a:rPr>
+              <a:t>•  Clave simétrica compartida — La misma clave genera y verifica el MAC</a:t>
+            </a:r>
+          </a:p>
+          <a:p>
+            <a:pPr>
+              <a:spcAft>
+                <a:spcPts val="600"/>
+              </a:spcAft>
+            </a:pPr>
+            <a:r>
+              <a:rPr sz="1500">
+                <a:solidFill>
+                  <a:srgbClr val="22282E"/>
+                </a:solidFill>
+              </a:rPr>
+              <a:t>•  No repudio — Imposibilidad de negar la autoría; el MAC no lo da</a:t>
+            </a:r>
+          </a:p>
+          <a:p>
+            <a:pPr>
+              <a:spcAft>
+                <a:spcPts val="600"/>
+              </a:spcAft>
+            </a:pPr>
+            <a:r>
+              <a:rPr sz="1500">
+                <a:solidFill>
+                  <a:srgbClr val="22282E"/>
+                </a:solidFill>
+              </a:rPr>
+              <a:t>•  HMAC — MAC estándar con dos pasadas de hash anidadas</a:t>
+            </a:r>
+          </a:p>
+          <a:p>
+            <a:pPr>
+              <a:spcAft>
+                <a:spcPts val="600"/>
+              </a:spcAft>
+            </a:pPr>
+            <a:r>
+              <a:rPr sz="1500">
+                <a:solidFill>
+                  <a:srgbClr val="22282E"/>
+                </a:solidFill>
+              </a:rPr>
+              <a:t>•  ipad / opad — Constantes de relleno interno y externo de HMAC</a:t>
             </a:r>
           </a:p>
         </p:txBody>
@@ -4539,7 +4930,7 @@
                   <a:srgbClr val="0B3D2E"/>
                 </a:solidFill>
               </a:rPr>
-              <a:t>✍️ Ejercicios</a:t>
+              <a:t>🧰 Herramientas y preparación</a:t>
             </a:r>
           </a:p>
         </p:txBody>
@@ -4577,82 +4968,7 @@
                   <a:srgbClr val="22282E"/>
                 </a:solidFill>
               </a:rPr>
-              <a:t>•  Explica por qué hash(clave || mensaje) es inseguro y HMAC no.</a:t>
-            </a:r>
-          </a:p>
-          <a:p>
-            <a:pPr>
-              <a:spcAft>
-                <a:spcPts val="600"/>
-              </a:spcAft>
-            </a:pPr>
-            <a:r>
-              <a:rPr sz="1500">
-                <a:solidFill>
-                  <a:srgbClr val="22282E"/>
-                </a:solidFill>
-              </a:rPr>
-              <a:t>•  Implementa Encrypt-then-MAC y verifica el MAC antes de descifrar.</a:t>
-            </a:r>
-          </a:p>
-          <a:p>
-            <a:pPr>
-              <a:spcAft>
-                <a:spcPts val="600"/>
-              </a:spcAft>
-            </a:pPr>
-            <a:r>
-              <a:rPr sz="1500">
-                <a:solidFill>
-                  <a:srgbClr val="22282E"/>
-                </a:solidFill>
-              </a:rPr>
-              <a:t>•  ¿Por qué se usan claves distintas para cifrar y para el MAC?</a:t>
-            </a:r>
-          </a:p>
-          <a:p>
-            <a:pPr>
-              <a:spcAft>
-                <a:spcPts val="600"/>
-              </a:spcAft>
-            </a:pPr>
-            <a:r>
-              <a:rPr sz="1500">
-                <a:solidFill>
-                  <a:srgbClr val="22282E"/>
-                </a:solidFill>
-              </a:rPr>
-              <a:t>•  Investiga cómo firma un JWT HS256 y verifica uno con tu HMAC.</a:t>
-            </a:r>
-          </a:p>
-          <a:p>
-            <a:pPr>
-              <a:spcAft>
-                <a:spcPts val="600"/>
-              </a:spcAft>
-            </a:pPr>
-            <a:r>
-              <a:rPr sz="1500">
-                <a:solidFill>
-                  <a:srgbClr val="22282E"/>
-                </a:solidFill>
-              </a:rPr>
-              <a:t>•  Demuestra que cambiar un bit del mensaje invalida el tag.</a:t>
-            </a:r>
-          </a:p>
-          <a:p>
-            <a:pPr>
-              <a:spcAft>
-                <a:spcPts val="600"/>
-              </a:spcAft>
-            </a:pPr>
-            <a:r>
-              <a:rPr sz="1500">
-                <a:solidFill>
-                  <a:srgbClr val="22282E"/>
-                </a:solidFill>
-              </a:rPr>
-              <a:t>•  Compara HMAC con los MAC integrados en AEAD (GCM/Poly1305).</a:t>
+              <a:t>•  Laboratorio local. Las claves de HMAC son de práctica.</a:t>
             </a:r>
           </a:p>
         </p:txBody>
@@ -4703,7 +5019,7 @@
                   <a:srgbClr val="0B3D2E"/>
                 </a:solidFill>
               </a:rPr>
-              <a:t>📝 Reto verificable</a:t>
+              <a:t>🧪 Laboratorio guiado</a:t>
             </a:r>
           </a:p>
         </p:txBody>
@@ -4741,7 +5057,67 @@
                   <a:srgbClr val="22282E"/>
                 </a:solidFill>
               </a:rPr>
-              <a:t>•  Implementa un canal autenticado sencillo: el emisor envía (IV, ciphertext, HMAC) y el receptor rechaza cualquier mensaje manipulado sin descifrarlo. Criterio de aceptación: alterar cualquier byte del IV, del texto cifrado o del tag provoca rechazo, y solo los mensajes íntegros se descifran.</a:t>
+              <a:t>•  HMAC con OpenSSL:</a:t>
+            </a:r>
+          </a:p>
+          <a:p>
+            <a:pPr>
+              <a:spcAft>
+                <a:spcPts val="600"/>
+              </a:spcAft>
+            </a:pPr>
+            <a:r>
+              <a:rPr sz="1500">
+                <a:solidFill>
+                  <a:srgbClr val="22282E"/>
+                </a:solidFill>
+              </a:rPr>
+              <a:t>•  HMAC en Python y verificación segura:</a:t>
+            </a:r>
+          </a:p>
+          <a:p>
+            <a:pPr>
+              <a:spcAft>
+                <a:spcPts val="600"/>
+              </a:spcAft>
+            </a:pPr>
+            <a:r>
+              <a:rPr sz="1500">
+                <a:solidFill>
+                  <a:srgbClr val="22282E"/>
+                </a:solidFill>
+              </a:rPr>
+              <a:t>•  Detecta manipulación: envía (mensaje, tag); el receptor recomputa el HMAC. Cambia un carácter del mensaje y comprueba que la verificación falla.</a:t>
+            </a:r>
+          </a:p>
+          <a:p>
+            <a:pPr>
+              <a:spcAft>
+                <a:spcPts val="600"/>
+              </a:spcAft>
+            </a:pPr>
+            <a:r>
+              <a:rPr sz="1500">
+                <a:solidFill>
+                  <a:srgbClr val="22282E"/>
+                </a:solidFill>
+              </a:rPr>
+              <a:t>•  Encrypt-then-MAC: cifra con AES-CBC, calcula HMAC-SHA256 sobre IV || ciphertext, y verifica el MAC antes de descifrar. Documenta por qué esto previene padding oracle (clase 060).</a:t>
+            </a:r>
+          </a:p>
+          <a:p>
+            <a:pPr>
+              <a:spcAft>
+                <a:spcPts val="600"/>
+              </a:spcAft>
+            </a:pPr>
+            <a:r>
+              <a:rPr sz="1500">
+                <a:solidFill>
+                  <a:srgbClr val="22282E"/>
+                </a:solidFill>
+              </a:rPr>
+              <a:t>•  Timing (concepto): implementa una comparación ingenua byte a byte con salida temprana y razona por qué filtra información; sustitúyela por comparedigest.</a:t>
             </a:r>
           </a:p>
         </p:txBody>
